--- a/docs/assets/Leibniz-KERT-Architecture.pptx
+++ b/docs/assets/Leibniz-KERT-Architecture.pptx
@@ -1116,360 +1116,6 @@
     </p:otherStyle>
   </p:txStyles>
 </p:sldMaster>
-</file>
-
-<file path=ppt/slides/slide1.xml><?xml version="1.0" encoding="utf-8"?>
-<p:sld xmlns:a="http://schemas.openxmlformats.org/drawingml/2006/main" xmlns:r="http://schemas.openxmlformats.org/officeDocument/2006/relationships" xmlns:p="http://schemas.openxmlformats.org/presentationml/2006/main">
-  <p:cSld name="Slide 1">
-    <p:bg>
-      <p:bgPr>
-        <a:solidFill>
-          <a:srgbClr val="2D3142"/>
-        </a:solidFill>
-      </p:bgPr>
-    </p:bg>
-    <p:spTree>
-      <p:nvGrpSpPr>
-        <p:cNvPr id="1" name=""/>
-        <p:cNvGrpSpPr/>
-        <p:nvPr/>
-      </p:nvGrpSpPr>
-      <p:grpSpPr>
-        <a:xfrm>
-          <a:off x="0" y="0"/>
-          <a:ext cx="0" cy="0"/>
-          <a:chOff x="0" y="0"/>
-          <a:chExt cx="0" cy="0"/>
-        </a:xfrm>
-      </p:grpSpPr>
-      <p:sp>
-        <p:nvSpPr>
-          <p:cNvPr id="2" name="Shape 0"/>
-          <p:cNvSpPr/>
-          <p:nvPr/>
-        </p:nvSpPr>
-        <p:spPr>
-          <a:xfrm>
-            <a:off x="0" y="2560320"/>
-            <a:ext cx="12191695" cy="27432"/>
-          </a:xfrm>
-          <a:prstGeom prst="RECTANGLE">
-            <a:avLst/>
-          </a:prstGeom>
-          <a:solidFill>
-            <a:srgbClr val="EB6C36"/>
-          </a:solidFill>
-          <a:ln w="12700">
-            <a:solidFill>
-              <a:srgbClr val="333333"/>
-            </a:solidFill>
-            <a:prstDash val="solid"/>
-          </a:ln>
-        </p:spPr>
-      </p:sp>
-      <p:sp>
-        <p:nvSpPr>
-          <p:cNvPr id="3" name="Text 1"/>
-          <p:cNvSpPr/>
-          <p:nvPr/>
-        </p:nvSpPr>
-        <p:spPr>
-          <a:xfrm>
-            <a:off x="731520" y="1097280"/>
-            <a:ext cx="10698480" cy="1097280"/>
-          </a:xfrm>
-          <a:prstGeom prst="rect">
-            <a:avLst/>
-          </a:prstGeom>
-          <a:noFill/>
-          <a:ln/>
-        </p:spPr>
-        <p:txBody>
-          <a:bodyPr wrap="square" rtlCol="0" anchor="ctr"/>
-          <a:lstStyle/>
-          <a:p>
-            <a:pPr algn="l" indent="0" marL="0">
-              <a:buNone/>
-            </a:pPr>
-            <a:r>
-              <a:rPr lang="en-US" sz="4200" dirty="0">
-                <a:solidFill>
-                  <a:srgbClr val="FFFFFF"/>
-                </a:solidFill>
-                <a:latin typeface="Georgia" pitchFamily="34" charset="0"/>
-                <a:ea typeface="Georgia" pitchFamily="34" charset="-122"/>
-                <a:cs typeface="Georgia" pitchFamily="34" charset="-120"/>
-              </a:rPr>
-              <a:t>Leibniz-KERT</a:t>
-            </a:r>
-            <a:endParaRPr lang="en-US" sz="4200" dirty="0"/>
-          </a:p>
-        </p:txBody>
-      </p:sp>
-      <p:sp>
-        <p:nvSpPr>
-          <p:cNvPr id="4" name="Text 2"/>
-          <p:cNvSpPr/>
-          <p:nvPr/>
-        </p:nvSpPr>
-        <p:spPr>
-          <a:xfrm>
-            <a:off x="731520" y="2834640"/>
-            <a:ext cx="10698480" cy="548640"/>
-          </a:xfrm>
-          <a:prstGeom prst="rect">
-            <a:avLst/>
-          </a:prstGeom>
-          <a:noFill/>
-          <a:ln/>
-        </p:spPr>
-        <p:txBody>
-          <a:bodyPr wrap="square" rtlCol="0" anchor="ctr"/>
-          <a:lstStyle/>
-          <a:p>
-            <a:pPr algn="l" indent="0" marL="0">
-              <a:buNone/>
-            </a:pPr>
-            <a:r>
-              <a:rPr lang="en-US" sz="1600" dirty="0">
-                <a:solidFill>
-                  <a:srgbClr val="EB6C36"/>
-                </a:solidFill>
-                <a:latin typeface="Microsoft YaHei" pitchFamily="34" charset="0"/>
-                <a:ea typeface="Microsoft YaHei" pitchFamily="34" charset="-122"/>
-                <a:cs typeface="Microsoft YaHei" pitchFamily="34" charset="-120"/>
-              </a:rPr>
-              <a:t>DKWS 独立知识工程服务端 · C′ 混合架构</a:t>
-            </a:r>
-            <a:endParaRPr lang="en-US" sz="1600" dirty="0"/>
-          </a:p>
-        </p:txBody>
-      </p:sp>
-      <p:sp>
-        <p:nvSpPr>
-          <p:cNvPr id="5" name="Text 3"/>
-          <p:cNvSpPr/>
-          <p:nvPr/>
-        </p:nvSpPr>
-        <p:spPr>
-          <a:xfrm>
-            <a:off x="731520" y="3474720"/>
-            <a:ext cx="10698480" cy="457200"/>
-          </a:xfrm>
-          <a:prstGeom prst="rect">
-            <a:avLst/>
-          </a:prstGeom>
-          <a:noFill/>
-          <a:ln/>
-        </p:spPr>
-        <p:txBody>
-          <a:bodyPr wrap="square" rtlCol="0" anchor="ctr"/>
-          <a:lstStyle/>
-          <a:p>
-            <a:pPr algn="l" indent="0" marL="0">
-              <a:buNone/>
-            </a:pPr>
-            <a:r>
-              <a:rPr lang="en-US" sz="1300" dirty="0">
-                <a:solidFill>
-                  <a:srgbClr val="7A8399"/>
-                </a:solidFill>
-                <a:latin typeface="Microsoft YaHei" pitchFamily="34" charset="0"/>
-                <a:ea typeface="Microsoft YaHei" pitchFamily="34" charset="-122"/>
-                <a:cs typeface="Microsoft YaHei" pitchFamily="34" charset="-120"/>
-              </a:rPr>
-              <a:t>知识架构 · 功能布局 · 技术栈</a:t>
-            </a:r>
-            <a:endParaRPr lang="en-US" sz="1300" dirty="0"/>
-          </a:p>
-        </p:txBody>
-      </p:sp>
-      <p:sp>
-        <p:nvSpPr>
-          <p:cNvPr id="6" name="Text 4"/>
-          <p:cNvSpPr/>
-          <p:nvPr/>
-        </p:nvSpPr>
-        <p:spPr>
-          <a:xfrm>
-            <a:off x="731520" y="5943600"/>
-            <a:ext cx="10698480" cy="365760"/>
-          </a:xfrm>
-          <a:prstGeom prst="rect">
-            <a:avLst/>
-          </a:prstGeom>
-          <a:noFill/>
-          <a:ln/>
-        </p:spPr>
-        <p:txBody>
-          <a:bodyPr wrap="square" rtlCol="0" anchor="ctr"/>
-          <a:lstStyle/>
-          <a:p>
-            <a:pPr algn="l" indent="0" marL="0">
-              <a:buNone/>
-            </a:pPr>
-            <a:r>
-              <a:rPr lang="en-US" sz="1000" dirty="0">
-                <a:solidFill>
-                  <a:srgbClr val="4F5D75"/>
-                </a:solidFill>
-                <a:latin typeface="Consolas" pitchFamily="34" charset="0"/>
-                <a:ea typeface="Consolas" pitchFamily="34" charset="-122"/>
-                <a:cs typeface="Consolas" pitchFamily="34" charset="-120"/>
-              </a:rPr>
-              <a:t>Architecture Overview · 2026</a:t>
-            </a:r>
-            <a:endParaRPr lang="en-US" sz="1000" dirty="0"/>
-          </a:p>
-        </p:txBody>
-      </p:sp>
-    </p:spTree>
-  </p:cSld>
-  <p:clrMapOvr>
-    <a:masterClrMapping/>
-  </p:clrMapOvr>
-</p:sld>
-</file>
-
-<file path=ppt/slides/slide2.xml><?xml version="1.0" encoding="utf-8"?>
-<p:sld xmlns:a="http://schemas.openxmlformats.org/drawingml/2006/main" xmlns:r="http://schemas.openxmlformats.org/officeDocument/2006/relationships" xmlns:p="http://schemas.openxmlformats.org/presentationml/2006/main">
-  <p:cSld name="Slide 2">
-    <p:bg>
-      <p:bgPr>
-        <a:solidFill>
-          <a:srgbClr val="F5F5F5"/>
-        </a:solidFill>
-      </p:bgPr>
-    </p:bg>
-    <p:spTree>
-      <p:nvGrpSpPr>
-        <p:cNvPr id="1" name=""/>
-        <p:cNvGrpSpPr/>
-        <p:nvPr/>
-      </p:nvGrpSpPr>
-      <p:grpSpPr>
-        <a:xfrm>
-          <a:off x="0" y="0"/>
-          <a:ext cx="0" cy="0"/>
-          <a:chOff x="0" y="0"/>
-          <a:chExt cx="0" cy="0"/>
-        </a:xfrm>
-      </p:grpSpPr>
-      <p:pic>
-        <p:nvPicPr>
-          <p:cNvPr id="2" name="Image 0" descr="/home/szf/dev/Leibniz-KERT/docs/assets/dkws-knowledge-architecture.png">    </p:cNvPr>
-          <p:cNvPicPr>
-            <a:picLocks noChangeAspect="1"/>
-          </p:cNvPicPr>
-          <p:nvPr/>
-        </p:nvPicPr>
-        <p:blipFill>
-          <a:blip r:embed="rId1"/>
-          <a:srcRect l="0" r="0" t="0" b="0"/>
-          <a:stretch/>
-        </p:blipFill>
-        <p:spPr>
-          <a:xfrm>
-            <a:off x="91440" y="45720"/>
-            <a:ext cx="11978640" cy="6766560"/>
-          </a:xfrm>
-          <a:prstGeom prst="rect">
-            <a:avLst/>
-          </a:prstGeom>
-        </p:spPr>
-      </p:pic>
-      <p:sp>
-        <p:nvSpPr>
-          <p:cNvPr id="3" name="Text 0"/>
-          <p:cNvSpPr/>
-          <p:nvPr/>
-        </p:nvSpPr>
-        <p:spPr>
-          <a:xfrm>
-            <a:off x="274320" y="45720"/>
-            <a:ext cx="7315200" cy="320040"/>
-          </a:xfrm>
-          <a:prstGeom prst="rect">
-            <a:avLst/>
-          </a:prstGeom>
-          <a:solidFill>
-            <a:srgbClr val="F5F5F5">
-              <a:alpha val="30000"/>
-            </a:srgbClr>
-          </a:solidFill>
-          <a:ln/>
-        </p:spPr>
-        <p:txBody>
-          <a:bodyPr wrap="square" rtlCol="0" anchor="ctr"/>
-          <a:lstStyle/>
-          <a:p>
-            <a:pPr algn="l" indent="0" marL="0">
-              <a:buNone/>
-            </a:pPr>
-            <a:r>
-              <a:rPr lang="en-US" sz="1500" b="1" dirty="0">
-                <a:solidFill>
-                  <a:srgbClr val="2D3142"/>
-                </a:solidFill>
-                <a:latin typeface="Microsoft YaHei" pitchFamily="34" charset="0"/>
-                <a:ea typeface="Microsoft YaHei" pitchFamily="34" charset="-122"/>
-                <a:cs typeface="Microsoft YaHei" pitchFamily="34" charset="-120"/>
-              </a:rPr>
-              <a:t>DKWS 知识架构：知识地图 · 知识目录 · 知识资产</a:t>
-            </a:r>
-            <a:endParaRPr lang="en-US" sz="1500" dirty="0"/>
-          </a:p>
-        </p:txBody>
-      </p:sp>
-      <p:sp>
-        <p:nvSpPr>
-          <p:cNvPr id="4" name="Text 1"/>
-          <p:cNvSpPr/>
-          <p:nvPr/>
-        </p:nvSpPr>
-        <p:spPr>
-          <a:xfrm>
-            <a:off x="274320" y="6400800"/>
-            <a:ext cx="11612880" cy="320040"/>
-          </a:xfrm>
-          <a:prstGeom prst="rect">
-            <a:avLst/>
-          </a:prstGeom>
-          <a:solidFill>
-            <a:srgbClr val="F5F5F5">
-              <a:alpha val="50000"/>
-            </a:srgbClr>
-          </a:solidFill>
-          <a:ln/>
-        </p:spPr>
-        <p:txBody>
-          <a:bodyPr wrap="square" rtlCol="0" anchor="ctr"/>
-          <a:lstStyle/>
-          <a:p>
-            <a:pPr algn="l" indent="0" marL="0">
-              <a:buNone/>
-            </a:pPr>
-            <a:r>
-              <a:rPr lang="en-US" sz="900" i="1" dirty="0">
-                <a:solidFill>
-                  <a:srgbClr val="4F5D75"/>
-                </a:solidFill>
-                <a:latin typeface="Microsoft YaHei" pitchFamily="34" charset="0"/>
-                <a:ea typeface="Microsoft YaHei" pitchFamily="34" charset="-122"/>
-                <a:cs typeface="Microsoft YaHei" pitchFamily="34" charset="-120"/>
-              </a:rPr>
-              <a:t>知识地图定义「用什么」→ 知识目录定义「怎么找」→ 知识资产定义「是什么」→ 工作空间定义「放哪里」→ 生命周期定义「怎么流转」</a:t>
-            </a:r>
-            <a:endParaRPr lang="en-US" sz="900" dirty="0"/>
-          </a:p>
-        </p:txBody>
-      </p:sp>
-    </p:spTree>
-  </p:cSld>
-  <p:clrMapOvr>
-    <a:masterClrMapping/>
-  </p:clrMapOvr>
-</p:sld>
 </file>
 
 <file path=ppt/slides/slide3.xml><?xml version="1.0" encoding="utf-8"?>
